--- a/templates/duo.pptx
+++ b/templates/duo.pptx
@@ -343,7 +343,7 @@
             <a:fld id="{1D8BD707-D9CF-40AE-B4C6-C98DA3205C09}" type="datetimeFigureOut">
               <a:rPr lang="en-US" smtClean="0"/>
               <a:pPr/>
-              <a:t>6/23/2026</a:t>
+              <a:t>6/26/2026</a:t>
             </a:fld>
             <a:endParaRPr lang="en-US"/>
           </a:p>
@@ -508,7 +508,7 @@
             <a:fld id="{1D8BD707-D9CF-40AE-B4C6-C98DA3205C09}" type="datetimeFigureOut">
               <a:rPr lang="en-US" smtClean="0"/>
               <a:pPr/>
-              <a:t>6/23/2026</a:t>
+              <a:t>6/26/2026</a:t>
             </a:fld>
             <a:endParaRPr lang="en-US"/>
           </a:p>
@@ -683,7 +683,7 @@
             <a:fld id="{1D8BD707-D9CF-40AE-B4C6-C98DA3205C09}" type="datetimeFigureOut">
               <a:rPr lang="en-US" smtClean="0"/>
               <a:pPr/>
-              <a:t>6/23/2026</a:t>
+              <a:t>6/26/2026</a:t>
             </a:fld>
             <a:endParaRPr lang="en-US"/>
           </a:p>
@@ -848,7 +848,7 @@
             <a:fld id="{1D8BD707-D9CF-40AE-B4C6-C98DA3205C09}" type="datetimeFigureOut">
               <a:rPr lang="en-US" smtClean="0"/>
               <a:pPr/>
-              <a:t>6/23/2026</a:t>
+              <a:t>6/26/2026</a:t>
             </a:fld>
             <a:endParaRPr lang="en-US"/>
           </a:p>
@@ -1090,7 +1090,7 @@
             <a:fld id="{1D8BD707-D9CF-40AE-B4C6-C98DA3205C09}" type="datetimeFigureOut">
               <a:rPr lang="en-US" smtClean="0"/>
               <a:pPr/>
-              <a:t>6/23/2026</a:t>
+              <a:t>6/26/2026</a:t>
             </a:fld>
             <a:endParaRPr lang="en-US"/>
           </a:p>
@@ -1372,7 +1372,7 @@
             <a:fld id="{1D8BD707-D9CF-40AE-B4C6-C98DA3205C09}" type="datetimeFigureOut">
               <a:rPr lang="en-US" smtClean="0"/>
               <a:pPr/>
-              <a:t>6/23/2026</a:t>
+              <a:t>6/26/2026</a:t>
             </a:fld>
             <a:endParaRPr lang="en-US"/>
           </a:p>
@@ -1788,7 +1788,7 @@
             <a:fld id="{1D8BD707-D9CF-40AE-B4C6-C98DA3205C09}" type="datetimeFigureOut">
               <a:rPr lang="en-US" smtClean="0"/>
               <a:pPr/>
-              <a:t>6/23/2026</a:t>
+              <a:t>6/26/2026</a:t>
             </a:fld>
             <a:endParaRPr lang="en-US"/>
           </a:p>
@@ -1902,7 +1902,7 @@
             <a:fld id="{1D8BD707-D9CF-40AE-B4C6-C98DA3205C09}" type="datetimeFigureOut">
               <a:rPr lang="en-US" smtClean="0"/>
               <a:pPr/>
-              <a:t>6/23/2026</a:t>
+              <a:t>6/26/2026</a:t>
             </a:fld>
             <a:endParaRPr lang="en-US"/>
           </a:p>
@@ -1994,7 +1994,7 @@
             <a:fld id="{1D8BD707-D9CF-40AE-B4C6-C98DA3205C09}" type="datetimeFigureOut">
               <a:rPr lang="en-US" smtClean="0"/>
               <a:pPr/>
-              <a:t>6/23/2026</a:t>
+              <a:t>6/26/2026</a:t>
             </a:fld>
             <a:endParaRPr lang="en-US"/>
           </a:p>
@@ -2266,7 +2266,7 @@
             <a:fld id="{1D8BD707-D9CF-40AE-B4C6-C98DA3205C09}" type="datetimeFigureOut">
               <a:rPr lang="en-US" smtClean="0"/>
               <a:pPr/>
-              <a:t>6/23/2026</a:t>
+              <a:t>6/26/2026</a:t>
             </a:fld>
             <a:endParaRPr lang="en-US"/>
           </a:p>
@@ -2515,7 +2515,7 @@
             <a:fld id="{1D8BD707-D9CF-40AE-B4C6-C98DA3205C09}" type="datetimeFigureOut">
               <a:rPr lang="en-US" smtClean="0"/>
               <a:pPr/>
-              <a:t>6/23/2026</a:t>
+              <a:t>6/26/2026</a:t>
             </a:fld>
             <a:endParaRPr lang="en-US"/>
           </a:p>
@@ -2723,7 +2723,7 @@
             <a:fld id="{1D8BD707-D9CF-40AE-B4C6-C98DA3205C09}" type="datetimeFigureOut">
               <a:rPr lang="en-US" smtClean="0"/>
               <a:pPr/>
-              <a:t>6/23/2026</a:t>
+              <a:t>6/26/2026</a:t>
             </a:fld>
             <a:endParaRPr lang="en-US"/>
           </a:p>
@@ -3343,7 +3343,7 @@
         <p:spPr>
           <a:xfrm>
             <a:off x="2897064" y="5525788"/>
-            <a:ext cx="4345068" cy="573746"/>
+            <a:ext cx="4345068" cy="534826"/>
           </a:xfrm>
           <a:prstGeom prst="rect">
             <a:avLst/>
@@ -3361,7 +3361,7 @@
               </a:lnSpc>
             </a:pPr>
             <a:r>
-              <a:rPr lang="en-US" sz="3300" b="1" dirty="0">
+              <a:rPr lang="en-US" sz="2500" b="1" dirty="0">
                 <a:solidFill>
                   <a:srgbClr val="000000"/>
                 </a:solidFill>
@@ -9902,7 +9902,7 @@
         <p:spPr>
           <a:xfrm>
             <a:off x="5578684" y="2993443"/>
-            <a:ext cx="3817902" cy="548130"/>
+            <a:ext cx="3817902" cy="505972"/>
           </a:xfrm>
           <a:prstGeom prst="rect">
             <a:avLst/>
@@ -9920,7 +9920,7 @@
               </a:lnSpc>
             </a:pPr>
             <a:r>
-              <a:rPr lang="en-US" sz="3170" b="1" dirty="0">
+              <a:rPr lang="en-US" sz="2500" b="1" dirty="0">
                 <a:solidFill>
                   <a:srgbClr val="FFFFFF"/>
                 </a:solidFill>
@@ -10225,7 +10225,7 @@
                 <a:cs typeface="Open Sans Bold Italics"/>
                 <a:sym typeface="Open Sans Bold Italics"/>
               </a:rPr>
-              <a:t>: 60 meses.</a:t>
+              <a:t>: [PRAZO]</a:t>
             </a:r>
           </a:p>
           <a:p>

--- a/templates/duo.pptx
+++ b/templates/duo.pptx
@@ -9401,118 +9401,6 @@
           </a:p>
         </p:txBody>
       </p:sp>
-      <p:grpSp>
-        <p:nvGrpSpPr>
-          <p:cNvPr id="76" name="Group 46">
-            <a:extLst>
-              <a:ext uri="{FF2B5EF4-FFF2-40B4-BE49-F238E27FC236}">
-                <a16:creationId xmlns:a16="http://schemas.microsoft.com/office/drawing/2014/main" id="{3C5931B2-4AB2-9443-056C-3EB1EB1CFA71}"/>
-              </a:ext>
-            </a:extLst>
-          </p:cNvPr>
-          <p:cNvGrpSpPr/>
-          <p:nvPr/>
-        </p:nvGrpSpPr>
-        <p:grpSpPr>
-          <a:xfrm>
-            <a:off x="7620001" y="6972426"/>
-            <a:ext cx="326418" cy="278090"/>
-            <a:chOff x="0" y="0"/>
-            <a:chExt cx="62793" cy="73242"/>
-          </a:xfrm>
-        </p:grpSpPr>
-        <p:sp>
-          <p:nvSpPr>
-            <p:cNvPr id="77" name="Freeform 47">
-              <a:extLst>
-                <a:ext uri="{FF2B5EF4-FFF2-40B4-BE49-F238E27FC236}">
-                  <a16:creationId xmlns:a16="http://schemas.microsoft.com/office/drawing/2014/main" id="{2CCB03DD-38A2-A423-42B7-70CDD8ABA3AD}"/>
-                </a:ext>
-              </a:extLst>
-            </p:cNvPr>
-            <p:cNvSpPr/>
-            <p:nvPr/>
-          </p:nvSpPr>
-          <p:spPr>
-            <a:xfrm>
-              <a:off x="0" y="0"/>
-              <a:ext cx="62793" cy="73242"/>
-            </a:xfrm>
-            <a:custGeom>
-              <a:avLst/>
-              <a:gdLst/>
-              <a:ahLst/>
-              <a:cxnLst/>
-              <a:rect l="l" t="t" r="r" b="b"/>
-              <a:pathLst>
-                <a:path w="62793" h="73242">
-                  <a:moveTo>
-                    <a:pt x="0" y="0"/>
-                  </a:moveTo>
-                  <a:lnTo>
-                    <a:pt x="62793" y="0"/>
-                  </a:lnTo>
-                  <a:lnTo>
-                    <a:pt x="62793" y="73242"/>
-                  </a:lnTo>
-                  <a:lnTo>
-                    <a:pt x="0" y="73242"/>
-                  </a:lnTo>
-                  <a:close/>
-                </a:path>
-              </a:pathLst>
-            </a:custGeom>
-            <a:solidFill>
-              <a:srgbClr val="FFD300"/>
-            </a:solidFill>
-          </p:spPr>
-        </p:sp>
-        <p:sp>
-          <p:nvSpPr>
-            <p:cNvPr id="78" name="TextBox 48">
-              <a:extLst>
-                <a:ext uri="{FF2B5EF4-FFF2-40B4-BE49-F238E27FC236}">
-                  <a16:creationId xmlns:a16="http://schemas.microsoft.com/office/drawing/2014/main" id="{3F99ADB5-3A82-1031-BF0D-458FA2070F50}"/>
-                </a:ext>
-              </a:extLst>
-            </p:cNvPr>
-            <p:cNvSpPr txBox="1"/>
-            <p:nvPr/>
-          </p:nvSpPr>
-          <p:spPr>
-            <a:xfrm>
-              <a:off x="0" y="-19050"/>
-              <a:ext cx="62793" cy="92292"/>
-            </a:xfrm>
-            <a:prstGeom prst="rect">
-              <a:avLst/>
-            </a:prstGeom>
-          </p:spPr>
-          <p:txBody>
-            <a:bodyPr lIns="50800" tIns="50800" rIns="50800" bIns="50800" rtlCol="0" anchor="ctr"/>
-            <a:lstStyle/>
-            <a:p>
-              <a:pPr algn="ctr">
-                <a:lnSpc>
-                  <a:spcPts val="1387"/>
-                </a:lnSpc>
-              </a:pPr>
-              <a:r>
-                <a:rPr lang="en-US" sz="990" b="1" i="1">
-                  <a:solidFill>
-                    <a:srgbClr val="000000"/>
-                  </a:solidFill>
-                  <a:latin typeface="Open Sans Bold Italics"/>
-                  <a:ea typeface="Open Sans Bold Italics"/>
-                  <a:cs typeface="Open Sans Bold Italics"/>
-                  <a:sym typeface="Open Sans Bold Italics"/>
-                </a:rPr>
-                <a:t>01</a:t>
-              </a:r>
-            </a:p>
-          </p:txBody>
-        </p:sp>
-      </p:grpSp>
     </p:spTree>
   </p:cSld>
   <p:clrMapOvr>
